--- a/docs/l5-powers/lesson-cards.pptx
+++ b/docs/l5-powers/lesson-cards.pptx
@@ -17,6 +17,7 @@
     <p:sldId id="262" r:id="rId13"/>
     <p:sldId id="263" r:id="rId14"/>
     <p:sldId id="264" r:id="rId15"/>
+    <p:sldId id="265" r:id="rId16"/>
   </p:sldIdLst>
   <p:sldSz cx="12192000" cy="6858000"/>
   <p:notesSz cx="6858000" cy="9144000"/>
@@ -566,7 +567,83 @@
                 </a:solidFill>
                 <a:latin typeface="Garamond"/>
               </a:rPr>
-              <a:t>Lesson 1: Spec-driven development</a:t>
+              <a:t>Opening title card for the demo video.</a:t>
+            </a:r>
+          </a:p>
+        </p:txBody>
+      </p:sp>
+      <p:sp>
+        <p:nvSpPr>
+          <p:cNvPr id="4" name="Slide Number Placeholder 3"/>
+          <p:cNvSpPr>
+            <a:spLocks noGrp="1"/>
+          </p:cNvSpPr>
+          <p:nvPr>
+            <p:ph type="sldNum" idx="5" sz="quarter"/>
+          </p:nvPr>
+        </p:nvSpPr>
+        <p:spPr/>
+      </p:sp>
+    </p:spTree>
+  </p:cSld>
+  <p:clrMapOvr>
+    <a:masterClrMapping/>
+  </p:clrMapOvr>
+</p:notes>
+</file>
+
+<file path=ppt/notesSlides/notesSlide10.xml><?xml version="1.0" encoding="utf-8"?>
+<p:notes xmlns:a="http://schemas.openxmlformats.org/drawingml/2006/main" xmlns:p="http://schemas.openxmlformats.org/presentationml/2006/main" xmlns:r="http://schemas.openxmlformats.org/officeDocument/2006/relationships">
+  <p:cSld>
+    <p:spTree>
+      <p:nvGrpSpPr>
+        <p:cNvPr id="1" name=""/>
+        <p:cNvGrpSpPr/>
+        <p:nvPr/>
+      </p:nvGrpSpPr>
+      <p:grpSpPr>
+        <a:xfrm>
+          <a:off x="0" y="0"/>
+          <a:ext cx="0" cy="0"/>
+          <a:chOff x="0" y="0"/>
+          <a:chExt cx="0" cy="0"/>
+        </a:xfrm>
+      </p:grpSpPr>
+      <p:sp>
+        <p:nvSpPr>
+          <p:cNvPr id="2" name="Slide Image Placeholder 1"/>
+          <p:cNvSpPr>
+            <a:spLocks noGrp="1"/>
+          </p:cNvSpPr>
+          <p:nvPr>
+            <p:ph type="sldImg" idx="2"/>
+          </p:nvPr>
+        </p:nvSpPr>
+        <p:spPr/>
+      </p:sp>
+      <p:sp>
+        <p:nvSpPr>
+          <p:cNvPr id="3" name="Notes Placeholder 2"/>
+          <p:cNvSpPr>
+            <a:spLocks noGrp="1"/>
+          </p:cNvSpPr>
+          <p:nvPr>
+            <p:ph type="body" idx="3" sz="quarter"/>
+          </p:nvPr>
+        </p:nvSpPr>
+        <p:spPr/>
+        <p:txBody>
+          <a:bodyPr/>
+          <a:lstStyle/>
+          <a:p>
+            <a:r>
+              <a:rPr>
+                <a:solidFill>
+                  <a:srgbClr val="F5E6B8"/>
+                </a:solidFill>
+                <a:latin typeface="Garamond"/>
+              </a:rPr>
+              <a:t>Bonus: Kiro Web / cloud</a:t>
             </a:r>
           </a:p>
         </p:txBody>
@@ -642,7 +719,7 @@
                 </a:solidFill>
                 <a:latin typeface="Garamond"/>
               </a:rPr>
-              <a:t>Lesson 2: Steering</a:t>
+              <a:t>Lesson 1: Spec-driven development</a:t>
             </a:r>
           </a:p>
         </p:txBody>
@@ -718,7 +795,7 @@
                 </a:solidFill>
                 <a:latin typeface="Garamond"/>
               </a:rPr>
-              <a:t>Lesson 3: Hooks</a:t>
+              <a:t>Lesson 2: Steering</a:t>
             </a:r>
           </a:p>
         </p:txBody>
@@ -794,7 +871,7 @@
                 </a:solidFill>
                 <a:latin typeface="Garamond"/>
               </a:rPr>
-              <a:t>Lesson 4: Property-based testing</a:t>
+              <a:t>Lesson 3: Hooks</a:t>
             </a:r>
           </a:p>
         </p:txBody>
@@ -870,7 +947,7 @@
                 </a:solidFill>
                 <a:latin typeface="Garamond"/>
               </a:rPr>
-              <a:t>Lesson 5: Powers</a:t>
+              <a:t>Lesson 4: Property-based testing</a:t>
             </a:r>
           </a:p>
         </p:txBody>
@@ -946,7 +1023,7 @@
                 </a:solidFill>
                 <a:latin typeface="Garamond"/>
               </a:rPr>
-              <a:t>Lesson 6: MCP</a:t>
+              <a:t>Lesson 5: Powers</a:t>
             </a:r>
           </a:p>
         </p:txBody>
@@ -1022,7 +1099,7 @@
                 </a:solidFill>
                 <a:latin typeface="Garamond"/>
               </a:rPr>
-              <a:t>Lesson 7: Custom agents</a:t>
+              <a:t>Lesson 6: MCP</a:t>
             </a:r>
           </a:p>
         </p:txBody>
@@ -1098,7 +1175,7 @@
                 </a:solidFill>
                 <a:latin typeface="Garamond"/>
               </a:rPr>
-              <a:t>Bonus: Package a power</a:t>
+              <a:t>Lesson 7: Custom agents</a:t>
             </a:r>
           </a:p>
         </p:txBody>
@@ -1174,7 +1251,7 @@
                 </a:solidFill>
                 <a:latin typeface="Garamond"/>
               </a:rPr>
-              <a:t>Bonus: Kiro Web / cloud</a:t>
+              <a:t>Bonus: Package a power</a:t>
             </a:r>
           </a:p>
         </p:txBody>
@@ -4191,7 +4268,7 @@
         <p:spPr>
           <a:xfrm>
             <a:off x="1016000" y="2286000"/>
-            <a:ext cx="762000" cy="50800"/>
+            <a:ext cx="1016000" cy="63500"/>
           </a:xfrm>
           <a:prstGeom prst="rect">
             <a:avLst/>
@@ -4234,7 +4311,7 @@
         <p:spPr>
           <a:xfrm>
             <a:off x="1016000" y="2540000"/>
-            <a:ext cx="10160000" cy="381000"/>
+            <a:ext cx="10160000" cy="952500"/>
           </a:xfrm>
           <a:prstGeom prst="rect">
             <a:avLst/>
@@ -4250,13 +4327,13 @@
           <a:p>
             <a:pPr algn="l"/>
             <a:r>
-              <a:rPr sz="2800">
+              <a:rPr sz="4800">
                 <a:solidFill>
-                  <a:srgbClr val="D4AF37"/>
+                  <a:srgbClr val="F5E6B8"/>
                 </a:solidFill>
                 <a:latin typeface="Garamond"/>
               </a:rPr>
-              <a:t>Lesson 1</a:t>
+              <a:t>ears-trace</a:t>
             </a:r>
           </a:p>
         </p:txBody>
@@ -4269,8 +4346,8 @@
         </p:nvSpPr>
         <p:spPr>
           <a:xfrm>
-            <a:off x="1016000" y="2984500"/>
-            <a:ext cx="10160000" cy="889000"/>
+            <a:off x="1016000" y="3556000"/>
+            <a:ext cx="10160000" cy="571500"/>
           </a:xfrm>
           <a:prstGeom prst="rect">
             <a:avLst/>
@@ -4286,13 +4363,13 @@
           <a:p>
             <a:pPr algn="l"/>
             <a:r>
-              <a:rPr sz="4800">
+              <a:rPr sz="2800">
                 <a:solidFill>
-                  <a:srgbClr val="F5E6B8"/>
+                  <a:srgbClr val="D4AF37"/>
                 </a:solidFill>
                 <a:latin typeface="Garamond"/>
               </a:rPr>
-              <a:t>Spec-driven development</a:t>
+              <a:t>Turn EARS requirements into a test-traceability report</a:t>
             </a:r>
           </a:p>
         </p:txBody>
@@ -4305,8 +4382,8 @@
         </p:nvSpPr>
         <p:spPr>
           <a:xfrm>
-            <a:off x="1016000" y="4064000"/>
-            <a:ext cx="10160000" cy="571500"/>
+            <a:off x="1016000" y="4254500"/>
+            <a:ext cx="10160000" cy="444500"/>
           </a:xfrm>
           <a:prstGeom prst="rect">
             <a:avLst/>
@@ -4328,7 +4405,176 @@
                 </a:solidFill>
                 <a:latin typeface="Garamond"/>
               </a:rPr>
-              <a:t>requirements -&gt; design -&gt; tasks in EARS, authored in Kiro Spec mode</a:t>
+              <a:t>Kiro University Challenge - Final project - Built with Kiro</a:t>
+            </a:r>
+          </a:p>
+        </p:txBody>
+      </p:sp>
+    </p:spTree>
+  </p:cSld>
+  <p:clrMapOvr>
+    <a:masterClrMapping/>
+  </p:clrMapOvr>
+</p:sld>
+</file>
+
+<file path=ppt/slides/slide10.xml><?xml version="1.0" encoding="utf-8"?>
+<p:sld xmlns:a="http://schemas.openxmlformats.org/drawingml/2006/main" xmlns:p="http://schemas.openxmlformats.org/presentationml/2006/main" xmlns:r="http://schemas.openxmlformats.org/officeDocument/2006/relationships">
+  <p:cSld>
+    <p:spTree>
+      <p:nvGrpSpPr>
+        <p:cNvPr id="1" name=""/>
+        <p:cNvGrpSpPr/>
+        <p:nvPr/>
+      </p:nvGrpSpPr>
+      <p:grpSpPr/>
+      <p:sp>
+        <p:nvSpPr>
+          <p:cNvPr id="2" name="Rectangle 1"/>
+          <p:cNvSpPr/>
+          <p:nvPr/>
+        </p:nvSpPr>
+        <p:spPr>
+          <a:xfrm>
+            <a:off x="1016000" y="2286000"/>
+            <a:ext cx="762000" cy="50800"/>
+          </a:xfrm>
+          <a:prstGeom prst="rect">
+            <a:avLst/>
+          </a:prstGeom>
+          <a:solidFill>
+            <a:srgbClr val="D4AF37"/>
+          </a:solidFill>
+          <a:ln>
+            <a:noFill/>
+          </a:ln>
+        </p:spPr>
+        <p:style>
+          <a:lnRef idx="1">
+            <a:schemeClr val="accent1"/>
+          </a:lnRef>
+          <a:fillRef idx="3">
+            <a:schemeClr val="accent1"/>
+          </a:fillRef>
+          <a:effectRef idx="2">
+            <a:schemeClr val="accent1"/>
+          </a:effectRef>
+          <a:fontRef idx="minor">
+            <a:schemeClr val="lt1"/>
+          </a:fontRef>
+        </p:style>
+        <p:txBody>
+          <a:bodyPr rtlCol="0" anchor="ctr"/>
+          <a:lstStyle/>
+          <a:p>
+            <a:pPr algn="ctr"/>
+          </a:p>
+        </p:txBody>
+      </p:sp>
+      <p:sp>
+        <p:nvSpPr>
+          <p:cNvPr id="3" name="TextBox 2"/>
+          <p:cNvSpPr txBox="1"/>
+          <p:nvPr/>
+        </p:nvSpPr>
+        <p:spPr>
+          <a:xfrm>
+            <a:off x="1016000" y="2540000"/>
+            <a:ext cx="10160000" cy="381000"/>
+          </a:xfrm>
+          <a:prstGeom prst="rect">
+            <a:avLst/>
+          </a:prstGeom>
+          <a:noFill/>
+          <a:ln>
+            <a:noFill/>
+          </a:ln>
+        </p:spPr>
+        <p:txBody>
+          <a:bodyPr lIns="0" rIns="0" wrap="square"/>
+          <a:lstStyle/>
+          <a:p>
+            <a:pPr algn="l"/>
+            <a:r>
+              <a:rPr sz="2800">
+                <a:solidFill>
+                  <a:srgbClr val="D4AF37"/>
+                </a:solidFill>
+                <a:latin typeface="Garamond"/>
+              </a:rPr>
+              <a:t>Bonus</a:t>
+            </a:r>
+          </a:p>
+        </p:txBody>
+      </p:sp>
+      <p:sp>
+        <p:nvSpPr>
+          <p:cNvPr id="4" name="TextBox 3"/>
+          <p:cNvSpPr txBox="1"/>
+          <p:nvPr/>
+        </p:nvSpPr>
+        <p:spPr>
+          <a:xfrm>
+            <a:off x="1016000" y="2984500"/>
+            <a:ext cx="10160000" cy="889000"/>
+          </a:xfrm>
+          <a:prstGeom prst="rect">
+            <a:avLst/>
+          </a:prstGeom>
+          <a:noFill/>
+          <a:ln>
+            <a:noFill/>
+          </a:ln>
+        </p:spPr>
+        <p:txBody>
+          <a:bodyPr lIns="0" rIns="0" wrap="square"/>
+          <a:lstStyle/>
+          <a:p>
+            <a:pPr algn="l"/>
+            <a:r>
+              <a:rPr sz="4800">
+                <a:solidFill>
+                  <a:srgbClr val="F5E6B8"/>
+                </a:solidFill>
+                <a:latin typeface="Garamond"/>
+              </a:rPr>
+              <a:t>Kiro Web / cloud</a:t>
+            </a:r>
+          </a:p>
+        </p:txBody>
+      </p:sp>
+      <p:sp>
+        <p:nvSpPr>
+          <p:cNvPr id="5" name="TextBox 4"/>
+          <p:cNvSpPr txBox="1"/>
+          <p:nvPr/>
+        </p:nvSpPr>
+        <p:spPr>
+          <a:xfrm>
+            <a:off x="1016000" y="4064000"/>
+            <a:ext cx="10160000" cy="571500"/>
+          </a:xfrm>
+          <a:prstGeom prst="rect">
+            <a:avLst/>
+          </a:prstGeom>
+          <a:noFill/>
+          <a:ln>
+            <a:noFill/>
+          </a:ln>
+        </p:spPr>
+        <p:txBody>
+          <a:bodyPr lIns="0" rIns="0" wrap="square"/>
+          <a:lstStyle/>
+          <a:p>
+            <a:pPr algn="l"/>
+            <a:r>
+              <a:rPr sz="1600">
+                <a:solidFill>
+                  <a:srgbClr val="9A9AAA"/>
+                </a:solidFill>
+                <a:latin typeface="Garamond"/>
+              </a:rPr>
+              <a:t>synced .kiro config, ran the build in the cloud sandbox</a:t>
             </a:r>
           </a:p>
         </p:txBody>
@@ -4425,7 +4671,7 @@
                 </a:solidFill>
                 <a:latin typeface="Garamond"/>
               </a:rPr>
-              <a:t>Lesson 2</a:t>
+              <a:t>Lesson 1</a:t>
             </a:r>
           </a:p>
         </p:txBody>
@@ -4461,7 +4707,7 @@
                 </a:solidFill>
                 <a:latin typeface="Garamond"/>
               </a:rPr>
-              <a:t>Steering</a:t>
+              <a:t>Spec-driven development</a:t>
             </a:r>
           </a:p>
         </p:txBody>
@@ -4497,7 +4743,7 @@
                 </a:solidFill>
                 <a:latin typeface="Garamond"/>
               </a:rPr>
-              <a:t>project conventions that steer code generation (.kiro/steering)</a:t>
+              <a:t>requirements -&gt; design -&gt; tasks in EARS, authored in Kiro Spec mode</a:t>
             </a:r>
           </a:p>
         </p:txBody>
@@ -4594,7 +4840,7 @@
                 </a:solidFill>
                 <a:latin typeface="Garamond"/>
               </a:rPr>
-              <a:t>Lesson 3</a:t>
+              <a:t>Lesson 2</a:t>
             </a:r>
           </a:p>
         </p:txBody>
@@ -4630,7 +4876,7 @@
                 </a:solidFill>
                 <a:latin typeface="Garamond"/>
               </a:rPr>
-              <a:t>Hooks</a:t>
+              <a:t>Steering</a:t>
             </a:r>
           </a:p>
         </p:txBody>
@@ -4666,7 +4912,7 @@
                 </a:solidFill>
                 <a:latin typeface="Garamond"/>
               </a:rPr>
-              <a:t>re-trace on save; Ruff on Python save (.kiro/hooks)</a:t>
+              <a:t>project conventions that steer code generation (.kiro/steering)</a:t>
             </a:r>
           </a:p>
         </p:txBody>
@@ -4763,7 +5009,7 @@
                 </a:solidFill>
                 <a:latin typeface="Garamond"/>
               </a:rPr>
-              <a:t>Lesson 4</a:t>
+              <a:t>Lesson 3</a:t>
             </a:r>
           </a:p>
         </p:txBody>
@@ -4799,7 +5045,7 @@
                 </a:solidFill>
                 <a:latin typeface="Garamond"/>
               </a:rPr>
-              <a:t>Property-based testing</a:t>
+              <a:t>Hooks</a:t>
             </a:r>
           </a:p>
         </p:txBody>
@@ -4835,7 +5081,7 @@
                 </a:solidFill>
                 <a:latin typeface="Garamond"/>
               </a:rPr>
-              <a:t>Hypothesis properties P1-P7 from the spec, run in Kiro IDE</a:t>
+              <a:t>re-trace on save; Ruff on Python save (.kiro/hooks)</a:t>
             </a:r>
           </a:p>
         </p:txBody>
@@ -4932,7 +5178,7 @@
                 </a:solidFill>
                 <a:latin typeface="Garamond"/>
               </a:rPr>
-              <a:t>Lesson 5</a:t>
+              <a:t>Lesson 4</a:t>
             </a:r>
           </a:p>
         </p:txBody>
@@ -4968,7 +5214,7 @@
                 </a:solidFill>
                 <a:latin typeface="Garamond"/>
               </a:rPr>
-              <a:t>Powers</a:t>
+              <a:t>Property-based testing</a:t>
             </a:r>
           </a:p>
         </p:txBody>
@@ -5004,7 +5250,7 @@
                 </a:solidFill>
                 <a:latin typeface="Garamond"/>
               </a:rPr>
-              <a:t>used a power to turn the coverage result into a slide deck</a:t>
+              <a:t>Hypothesis properties P1-P7 from the spec, run in Kiro IDE</a:t>
             </a:r>
           </a:p>
         </p:txBody>
@@ -5101,7 +5347,7 @@
                 </a:solidFill>
                 <a:latin typeface="Garamond"/>
               </a:rPr>
-              <a:t>Lesson 6</a:t>
+              <a:t>Lesson 5</a:t>
             </a:r>
           </a:p>
         </p:txBody>
@@ -5137,7 +5383,7 @@
                 </a:solidFill>
                 <a:latin typeface="Garamond"/>
               </a:rPr>
-              <a:t>MCP</a:t>
+              <a:t>Powers</a:t>
             </a:r>
           </a:p>
         </p:txBody>
@@ -5173,7 +5419,7 @@
                 </a:solidFill>
                 <a:latin typeface="Garamond"/>
               </a:rPr>
-              <a:t>fetch MCP enriches the report at runtime (.kiro/settings/mcp.json)</a:t>
+              <a:t>used a power to turn the coverage result into a slide deck</a:t>
             </a:r>
           </a:p>
         </p:txBody>
@@ -5270,7 +5516,7 @@
                 </a:solidFill>
                 <a:latin typeface="Garamond"/>
               </a:rPr>
-              <a:t>Lesson 7</a:t>
+              <a:t>Lesson 6</a:t>
             </a:r>
           </a:p>
         </p:txBody>
@@ -5306,7 +5552,7 @@
                 </a:solidFill>
                 <a:latin typeface="Garamond"/>
               </a:rPr>
-              <a:t>Custom agents</a:t>
+              <a:t>MCP</a:t>
             </a:r>
           </a:p>
         </p:txBody>
@@ -5342,7 +5588,7 @@
                 </a:solidFill>
                 <a:latin typeface="Garamond"/>
               </a:rPr>
-              <a:t>read-only requirements reviewer, least privilege</a:t>
+              <a:t>fetch MCP enriches the report at runtime (.kiro/settings/mcp.json)</a:t>
             </a:r>
           </a:p>
         </p:txBody>
@@ -5439,7 +5685,7 @@
                 </a:solidFill>
                 <a:latin typeface="Garamond"/>
               </a:rPr>
-              <a:t>Bonus</a:t>
+              <a:t>Lesson 7</a:t>
             </a:r>
           </a:p>
         </p:txBody>
@@ -5475,7 +5721,7 @@
                 </a:solidFill>
                 <a:latin typeface="Garamond"/>
               </a:rPr>
-              <a:t>Package a power</a:t>
+              <a:t>Custom agents</a:t>
             </a:r>
           </a:p>
         </p:txBody>
@@ -5511,7 +5757,7 @@
                 </a:solidFill>
                 <a:latin typeface="Garamond"/>
               </a:rPr>
-              <a:t>ears-trace packaged as its own Kiro power</a:t>
+              <a:t>read-only requirements reviewer, least privilege</a:t>
             </a:r>
           </a:p>
         </p:txBody>
@@ -5644,7 +5890,7 @@
                 </a:solidFill>
                 <a:latin typeface="Garamond"/>
               </a:rPr>
-              <a:t>Kiro Web / cloud</a:t>
+              <a:t>Package a power</a:t>
             </a:r>
           </a:p>
         </p:txBody>
@@ -5680,7 +5926,7 @@
                 </a:solidFill>
                 <a:latin typeface="Garamond"/>
               </a:rPr>
-              <a:t>synced .kiro config, ran the build in the cloud sandbox</a:t>
+              <a:t>ears-trace packaged as its own Kiro power</a:t>
             </a:r>
           </a:p>
         </p:txBody>
